--- a/PINNsClass/Presentacion_PINNs_Fisica_Solar.pptx
+++ b/PINNsClass/Presentacion_PINNs_Fisica_Solar.pptx
@@ -14192,7 +14192,7 @@
                 </a:solidFill>
                 <a:latin typeface="Open Sans"/>
               </a:rPr>
-              <a:t>1,621× más rápido</a:t>
+              <a:t>1,641× más rápido</a:t>
             </a:r>
             <a:r>
               <a:rPr sz="1500" b="0" i="0">
@@ -14651,7 +14651,7 @@
                           </a:solidFill>
                           <a:latin typeface="Open Sans"/>
                         </a:rPr>
-                        <a:t>21 ms</a:t>
+                        <a:t>20 ms</a:t>
                       </a:r>
                     </a:p>
                   </a:txBody>
@@ -14674,7 +14674,7 @@
                           </a:solidFill>
                           <a:latin typeface="Open Sans"/>
                         </a:rPr>
-                        <a:t>34 s</a:t>
+                        <a:t>33 s</a:t>
                       </a:r>
                     </a:p>
                   </a:txBody>
